--- a/assets/powerpoints/module-n1-inscription/B2-quel-quelle-et-la-date-de-naissance.pptx
+++ b/assets/powerpoints/module-n1-inscription/B2-quel-quelle-et-la-date-de-naissance.pptx
@@ -5077,7 +5077,25 @@
                 </a:solidFill>
                 <a:latin typeface="Verdana"/>
               </a:rPr>
-              <a:t>Quatre chiffres, toujours. Une fiche refuse souvent les deux chiffres, et « 26 » peut vouloir dire 1926 comme 2026. Le premier jour du mois, lui, s'écrit &lt;b&gt;1er&lt;/b&gt; : le 1er novembre, jamais « un novembre ».</a:t>
+              <a:t>Quatre chiffres, toujours. Une fiche refuse souvent les deux chiffres, et « 26 » peut vouloir dire 1926 comme 2026. Le premier jour du mois, lui, s'écrit </a:t>
+            </a:r>
+            <a:r>
+              <a:rPr sz="2000" b="1" i="0">
+                <a:solidFill>
+                  <a:srgbClr val="4B4F52"/>
+                </a:solidFill>
+                <a:latin typeface="Verdana"/>
+              </a:rPr>
+              <a:t>1er</a:t>
+            </a:r>
+            <a:r>
+              <a:rPr sz="2000" b="0" i="0">
+                <a:solidFill>
+                  <a:srgbClr val="4B4F52"/>
+                </a:solidFill>
+                <a:latin typeface="Verdana"/>
+              </a:rPr>
+              <a:t> : le 1er novembre, jamais « un novembre ».</a:t>
             </a:r>
           </a:p>
         </p:txBody>
@@ -9775,7 +9793,115 @@
                 </a:solidFill>
                 <a:latin typeface="Verdana"/>
               </a:rPr>
-              <a:t>La différence ne se voit qu'à l'écrit, et elle vient du mot d'après : &lt;b&gt;le&lt;/b&gt; nom, &lt;b&gt;le&lt;/b&gt; prénom, &lt;b&gt;le&lt;/b&gt; numéro sont masculins ; &lt;b&gt;l'&lt;/b&gt;adresse, &lt;b&gt;la&lt;/b&gt; date, &lt;b&gt;l'&lt;/b&gt;année sont féminines. À l'oral, vous ne pouvez pas vous tromper.</a:t>
+              <a:t>La différence ne se voit qu'à l'écrit, et elle vient du mot d'après : </a:t>
+            </a:r>
+            <a:r>
+              <a:rPr sz="2000" b="1" i="0">
+                <a:solidFill>
+                  <a:srgbClr val="4B4F52"/>
+                </a:solidFill>
+                <a:latin typeface="Verdana"/>
+              </a:rPr>
+              <a:t>le</a:t>
+            </a:r>
+            <a:r>
+              <a:rPr sz="2000" b="0" i="0">
+                <a:solidFill>
+                  <a:srgbClr val="4B4F52"/>
+                </a:solidFill>
+                <a:latin typeface="Verdana"/>
+              </a:rPr>
+              <a:t> nom, </a:t>
+            </a:r>
+            <a:r>
+              <a:rPr sz="2000" b="1" i="0">
+                <a:solidFill>
+                  <a:srgbClr val="4B4F52"/>
+                </a:solidFill>
+                <a:latin typeface="Verdana"/>
+              </a:rPr>
+              <a:t>le</a:t>
+            </a:r>
+            <a:r>
+              <a:rPr sz="2000" b="0" i="0">
+                <a:solidFill>
+                  <a:srgbClr val="4B4F52"/>
+                </a:solidFill>
+                <a:latin typeface="Verdana"/>
+              </a:rPr>
+              <a:t> prénom, </a:t>
+            </a:r>
+            <a:r>
+              <a:rPr sz="2000" b="1" i="0">
+                <a:solidFill>
+                  <a:srgbClr val="4B4F52"/>
+                </a:solidFill>
+                <a:latin typeface="Verdana"/>
+              </a:rPr>
+              <a:t>le</a:t>
+            </a:r>
+            <a:r>
+              <a:rPr sz="2000" b="0" i="0">
+                <a:solidFill>
+                  <a:srgbClr val="4B4F52"/>
+                </a:solidFill>
+                <a:latin typeface="Verdana"/>
+              </a:rPr>
+              <a:t> numéro sont masculins ; </a:t>
+            </a:r>
+            <a:r>
+              <a:rPr sz="2000" b="1" i="0">
+                <a:solidFill>
+                  <a:srgbClr val="4B4F52"/>
+                </a:solidFill>
+                <a:latin typeface="Verdana"/>
+              </a:rPr>
+              <a:t>l'</a:t>
+            </a:r>
+            <a:r>
+              <a:rPr sz="2000" b="0" i="0">
+                <a:solidFill>
+                  <a:srgbClr val="4B4F52"/>
+                </a:solidFill>
+                <a:latin typeface="Verdana"/>
+              </a:rPr>
+              <a:t>adresse, </a:t>
+            </a:r>
+            <a:r>
+              <a:rPr sz="2000" b="1" i="0">
+                <a:solidFill>
+                  <a:srgbClr val="4B4F52"/>
+                </a:solidFill>
+                <a:latin typeface="Verdana"/>
+              </a:rPr>
+              <a:t>la</a:t>
+            </a:r>
+            <a:r>
+              <a:rPr sz="2000" b="0" i="0">
+                <a:solidFill>
+                  <a:srgbClr val="4B4F52"/>
+                </a:solidFill>
+                <a:latin typeface="Verdana"/>
+              </a:rPr>
+              <a:t> date, </a:t>
+            </a:r>
+            <a:r>
+              <a:rPr sz="2000" b="1" i="0">
+                <a:solidFill>
+                  <a:srgbClr val="4B4F52"/>
+                </a:solidFill>
+                <a:latin typeface="Verdana"/>
+              </a:rPr>
+              <a:t>l'</a:t>
+            </a:r>
+            <a:r>
+              <a:rPr sz="2000" b="0" i="0">
+                <a:solidFill>
+                  <a:srgbClr val="4B4F52"/>
+                </a:solidFill>
+                <a:latin typeface="Verdana"/>
+              </a:rPr>
+              <a:t>année sont féminines. À l'oral, vous ne pouvez pas vous tromper.</a:t>
             </a:r>
           </a:p>
         </p:txBody>
@@ -10985,7 +11111,43 @@
                 </a:solidFill>
                 <a:latin typeface="Verdana"/>
               </a:rPr>
-              <a:t>Deux chiffres pour le jour — le 5 janvier s'écrit &lt;b&gt;05&lt;/b&gt; / 01 — deux pour le mois, et &lt;b&gt;quatre&lt;/b&gt; pour l'année : 1992, jamais 92. Dans plusieurs pays le mois passe devant : la même date y devient 03 / 12 / 1992, c'est-à-dire le 3 décembre.</a:t>
+              <a:t>Deux chiffres pour le jour — le 5 janvier s'écrit </a:t>
+            </a:r>
+            <a:r>
+              <a:rPr sz="2000" b="1" i="0">
+                <a:solidFill>
+                  <a:srgbClr val="4B4F52"/>
+                </a:solidFill>
+                <a:latin typeface="Verdana"/>
+              </a:rPr>
+              <a:t>05</a:t>
+            </a:r>
+            <a:r>
+              <a:rPr sz="2000" b="0" i="0">
+                <a:solidFill>
+                  <a:srgbClr val="4B4F52"/>
+                </a:solidFill>
+                <a:latin typeface="Verdana"/>
+              </a:rPr>
+              <a:t> / 01 — deux pour le mois, et </a:t>
+            </a:r>
+            <a:r>
+              <a:rPr sz="2000" b="1" i="0">
+                <a:solidFill>
+                  <a:srgbClr val="4B4F52"/>
+                </a:solidFill>
+                <a:latin typeface="Verdana"/>
+              </a:rPr>
+              <a:t>quatre</a:t>
+            </a:r>
+            <a:r>
+              <a:rPr sz="2000" b="0" i="0">
+                <a:solidFill>
+                  <a:srgbClr val="4B4F52"/>
+                </a:solidFill>
+                <a:latin typeface="Verdana"/>
+              </a:rPr>
+              <a:t> pour l'année : 1992, jamais 92. Dans plusieurs pays le mois passe devant : la même date y devient 03 / 12 / 1992, c'est-à-dire le 3 décembre.</a:t>
             </a:r>
           </a:p>
         </p:txBody>
